--- a/ETR.pptx
+++ b/ETR.pptx
@@ -5,7 +5,7 @@
     <p:sldMasterId id="2147483660" r:id="rId4"/>
   </p:sldMasterIdLst>
   <p:notesMasterIdLst>
-    <p:notesMasterId r:id="rId34"/>
+    <p:notesMasterId r:id="rId35"/>
   </p:notesMasterIdLst>
   <p:sldIdLst>
     <p:sldId id="278" r:id="rId5"/>
@@ -33,10 +33,11 @@
     <p:sldId id="303" r:id="rId27"/>
     <p:sldId id="306" r:id="rId28"/>
     <p:sldId id="307" r:id="rId29"/>
-    <p:sldId id="308" r:id="rId30"/>
-    <p:sldId id="309" r:id="rId31"/>
-    <p:sldId id="310" r:id="rId32"/>
-    <p:sldId id="287" r:id="rId33"/>
+    <p:sldId id="311" r:id="rId30"/>
+    <p:sldId id="308" r:id="rId31"/>
+    <p:sldId id="309" r:id="rId32"/>
+    <p:sldId id="310" r:id="rId33"/>
+    <p:sldId id="287" r:id="rId34"/>
   </p:sldIdLst>
   <p:sldSz cx="12192000" cy="6858000"/>
   <p:notesSz cx="6858000" cy="9144000"/>
@@ -225,7 +226,7 @@
           <a:p>
             <a:fld id="{AFD01546-198A-4195-BCF8-F0FF54C90E5E}" type="datetimeFigureOut">
               <a:rPr lang="en-US" smtClean="0"/>
-              <a:t>3/10/2026</a:t>
+              <a:t>3/11/2026</a:t>
             </a:fld>
             <a:endParaRPr lang="en-US" dirty="0"/>
           </a:p>
@@ -1325,7 +1326,7 @@
           <a:p>
             <a:fld id="{88D38747-4367-4BD2-8D51-C97E202738E2}" type="datetime1">
               <a:rPr lang="en-US" smtClean="0"/>
-              <a:t>3/10/2026</a:t>
+              <a:t>3/11/2026</a:t>
             </a:fld>
             <a:endParaRPr lang="en-US" dirty="0"/>
           </a:p>
@@ -1630,7 +1631,7 @@
           <a:p>
             <a:fld id="{11F1B079-7EF0-44EE-B798-BCC497C9F3B2}" type="datetime1">
               <a:rPr lang="en-US" smtClean="0"/>
-              <a:t>3/10/2026</a:t>
+              <a:t>3/11/2026</a:t>
             </a:fld>
             <a:endParaRPr lang="en-US" dirty="0"/>
           </a:p>
@@ -1824,7 +1825,7 @@
           <a:p>
             <a:fld id="{28FF70A8-1D13-4657-95F0-A9EA54967B8D}" type="datetime1">
               <a:rPr lang="en-US" smtClean="0"/>
-              <a:t>3/10/2026</a:t>
+              <a:t>3/11/2026</a:t>
             </a:fld>
             <a:endParaRPr lang="en-US" dirty="0"/>
           </a:p>
@@ -2087,7 +2088,7 @@
           <a:p>
             <a:fld id="{21EB90AC-71BD-4C7F-8ACA-7B3F18292E63}" type="datetime1">
               <a:rPr lang="en-US" smtClean="0"/>
-              <a:t>3/10/2026</a:t>
+              <a:t>3/11/2026</a:t>
             </a:fld>
             <a:endParaRPr lang="en-US" dirty="0"/>
           </a:p>
@@ -2523,7 +2524,7 @@
           <a:p>
             <a:fld id="{4E6EFC2C-8905-46F0-B443-CE905B76BA01}" type="datetime1">
               <a:rPr lang="en-US" smtClean="0"/>
-              <a:t>3/10/2026</a:t>
+              <a:t>3/11/2026</a:t>
             </a:fld>
             <a:endParaRPr lang="en-US" dirty="0"/>
           </a:p>
@@ -3060,7 +3061,7 @@
           <a:p>
             <a:fld id="{D9079DC3-C9B5-499E-9140-0DC28B7074E2}" type="datetime1">
               <a:rPr lang="en-US" smtClean="0"/>
-              <a:t>3/10/2026</a:t>
+              <a:t>3/11/2026</a:t>
             </a:fld>
             <a:endParaRPr lang="en-US" dirty="0"/>
           </a:p>
@@ -3942,7 +3943,7 @@
           <a:p>
             <a:fld id="{30BB33EA-E472-4D22-9C03-A9C14AA21CED}" type="datetime1">
               <a:rPr lang="en-US" smtClean="0"/>
-              <a:t>3/10/2026</a:t>
+              <a:t>3/11/2026</a:t>
             </a:fld>
             <a:endParaRPr lang="en-US" dirty="0"/>
           </a:p>
@@ -4112,7 +4113,7 @@
           <a:p>
             <a:fld id="{73C55A3C-5767-4844-A0A3-83778C2E5409}" type="datetime1">
               <a:rPr lang="en-US" smtClean="0"/>
-              <a:t>3/10/2026</a:t>
+              <a:t>3/11/2026</a:t>
             </a:fld>
             <a:endParaRPr lang="en-US" dirty="0"/>
           </a:p>
@@ -4356,7 +4357,7 @@
           <a:p>
             <a:fld id="{CAE507A8-A5CF-4D38-AB86-7EDDA87A85D4}" type="datetime1">
               <a:rPr lang="en-US" smtClean="0"/>
-              <a:t>3/10/2026</a:t>
+              <a:t>3/11/2026</a:t>
             </a:fld>
             <a:endParaRPr lang="en-US" dirty="0"/>
           </a:p>
@@ -4598,7 +4599,7 @@
           <a:p>
             <a:fld id="{BDFCD27C-8599-43EF-BA1D-14DDC1946E06}" type="datetime1">
               <a:rPr lang="en-US" smtClean="0"/>
-              <a:t>3/10/2026</a:t>
+              <a:t>3/11/2026</a:t>
             </a:fld>
             <a:endParaRPr lang="en-US" dirty="0"/>
           </a:p>
@@ -5081,7 +5082,7 @@
           <a:p>
             <a:fld id="{49343D99-809A-49C0-96E5-4250D0B498EE}" type="datetime1">
               <a:rPr lang="en-US" smtClean="0"/>
-              <a:t>3/10/2026</a:t>
+              <a:t>3/11/2026</a:t>
             </a:fld>
             <a:endParaRPr lang="en-US" dirty="0"/>
           </a:p>
@@ -5199,7 +5200,7 @@
           <a:p>
             <a:fld id="{A143DE9B-B678-4EFB-BB7D-A4370204A0B0}" type="datetime1">
               <a:rPr lang="en-US" smtClean="0"/>
-              <a:t>3/10/2026</a:t>
+              <a:t>3/11/2026</a:t>
             </a:fld>
             <a:endParaRPr lang="en-US" dirty="0"/>
           </a:p>
@@ -5294,7 +5295,7 @@
           <a:p>
             <a:fld id="{E68812DA-F765-4142-A6A3-A8ED7235E082}" type="datetime1">
               <a:rPr lang="en-US" smtClean="0"/>
-              <a:t>3/10/2026</a:t>
+              <a:t>3/11/2026</a:t>
             </a:fld>
             <a:endParaRPr lang="en-US" dirty="0"/>
           </a:p>
@@ -5549,7 +5550,7 @@
           <a:p>
             <a:fld id="{3E0277FD-7DE6-41D4-930D-AC99F5AFE54E}" type="datetime1">
               <a:rPr lang="en-US" smtClean="0"/>
-              <a:t>3/10/2026</a:t>
+              <a:t>3/11/2026</a:t>
             </a:fld>
             <a:endParaRPr lang="en-US" dirty="0"/>
           </a:p>
@@ -5856,7 +5857,7 @@
           <a:p>
             <a:fld id="{9EA15526-7079-4B7B-987C-1B5FAE11A0FF}" type="datetime1">
               <a:rPr lang="en-US" smtClean="0"/>
-              <a:t>3/10/2026</a:t>
+              <a:t>3/11/2026</a:t>
             </a:fld>
             <a:endParaRPr lang="en-US" dirty="0"/>
           </a:p>
@@ -6091,7 +6092,7 @@
           <a:p>
             <a:fld id="{073ED0CC-082F-4160-86E5-0D6041F12778}" type="datetime1">
               <a:rPr lang="en-US" smtClean="0"/>
-              <a:t>3/10/2026</a:t>
+              <a:t>3/11/2026</a:t>
             </a:fld>
             <a:endParaRPr lang="en-US" dirty="0"/>
           </a:p>
@@ -7009,7 +7010,7 @@
           </a:effectLst>
           <a:extLst>
             <a:ext uri="{91240B29-F687-4f45-9708-019B960494DF}">
-              <a14:hiddenLine xmlns:a16="http://schemas.microsoft.com/office/drawing/2014/main" xmlns:p14="http://schemas.microsoft.com/office/powerpoint/2010/main" xmlns:a14="http://schemas.microsoft.com/office/drawing/2010/main" xmlns="" w="9525">
+              <a14:hiddenLine xmlns="" xmlns:a14="http://schemas.microsoft.com/office/drawing/2010/main" xmlns:p14="http://schemas.microsoft.com/office/powerpoint/2010/main" xmlns:a16="http://schemas.microsoft.com/office/drawing/2014/main" w="9525">
                 <a:solidFill>
                   <a:srgbClr val="000000"/>
                 </a:solidFill>
@@ -15922,6 +15923,151 @@
         <p:cNvPr id="1" name="">
           <a:extLst>
             <a:ext uri="{FF2B5EF4-FFF2-40B4-BE49-F238E27FC236}">
+              <a16:creationId xmlns:a16="http://schemas.microsoft.com/office/drawing/2014/main" id="{73EB07D5-C92E-5960-30A9-496CB7EED8BB}"/>
+            </a:ext>
+          </a:extLst>
+        </p:cNvPr>
+        <p:cNvGrpSpPr/>
+        <p:nvPr/>
+      </p:nvGrpSpPr>
+      <p:grpSpPr>
+        <a:xfrm>
+          <a:off x="0" y="0"/>
+          <a:ext cx="0" cy="0"/>
+          <a:chOff x="0" y="0"/>
+          <a:chExt cx="0" cy="0"/>
+        </a:xfrm>
+      </p:grpSpPr>
+      <p:sp>
+        <p:nvSpPr>
+          <p:cNvPr id="2" name="Cím 1">
+            <a:extLst>
+              <a:ext uri="{FF2B5EF4-FFF2-40B4-BE49-F238E27FC236}">
+                <a16:creationId xmlns:a16="http://schemas.microsoft.com/office/drawing/2014/main" id="{B6B20662-D91F-DA3A-75B3-609444CE8A86}"/>
+              </a:ext>
+            </a:extLst>
+          </p:cNvPr>
+          <p:cNvSpPr>
+            <a:spLocks noGrp="1"/>
+          </p:cNvSpPr>
+          <p:nvPr>
+            <p:ph type="title"/>
+          </p:nvPr>
+        </p:nvSpPr>
+        <p:spPr>
+          <a:xfrm>
+            <a:off x="697178" y="2800350"/>
+            <a:ext cx="4540648" cy="1257300"/>
+          </a:xfrm>
+        </p:spPr>
+        <p:txBody>
+          <a:bodyPr>
+            <a:normAutofit fontScale="90000"/>
+          </a:bodyPr>
+          <a:lstStyle/>
+          <a:p>
+            <a:r>
+              <a:rPr lang="en-US" sz="4800" b="1" dirty="0" err="1">
+                <a:solidFill>
+                  <a:srgbClr val="FFFFFF"/>
+                </a:solidFill>
+                <a:latin typeface="Calibri" pitchFamily="34" charset="0"/>
+                <a:ea typeface="Calibri" pitchFamily="34" charset="-122"/>
+                <a:cs typeface="Calibri" pitchFamily="34" charset="-120"/>
+              </a:rPr>
+              <a:t>Adatbázis</a:t>
+            </a:r>
+            <a:r>
+              <a:rPr lang="en-US" sz="4800" b="1" dirty="0">
+                <a:solidFill>
+                  <a:srgbClr val="FFFFFF"/>
+                </a:solidFill>
+                <a:latin typeface="Calibri" pitchFamily="34" charset="0"/>
+                <a:ea typeface="Calibri" pitchFamily="34" charset="-122"/>
+                <a:cs typeface="Calibri" pitchFamily="34" charset="-120"/>
+              </a:rPr>
+              <a:t> – Prisma ORM + MySQL</a:t>
+            </a:r>
+            <a:endParaRPr lang="en-US" sz="4800" dirty="0"/>
+          </a:p>
+        </p:txBody>
+      </p:sp>
+      <p:pic>
+        <p:nvPicPr>
+          <p:cNvPr id="8" name="Kép 7">
+            <a:extLst>
+              <a:ext uri="{FF2B5EF4-FFF2-40B4-BE49-F238E27FC236}">
+                <a16:creationId xmlns:a16="http://schemas.microsoft.com/office/drawing/2014/main" id="{C1288FEF-1B90-4827-9D7C-D294BF1B6B0F}"/>
+              </a:ext>
+            </a:extLst>
+          </p:cNvPr>
+          <p:cNvPicPr>
+            <a:picLocks noChangeAspect="1"/>
+          </p:cNvPicPr>
+          <p:nvPr/>
+        </p:nvPicPr>
+        <p:blipFill>
+          <a:blip r:embed="rId2"/>
+          <a:stretch>
+            <a:fillRect/>
+          </a:stretch>
+        </p:blipFill>
+        <p:spPr>
+          <a:xfrm>
+            <a:off x="6096000" y="216423"/>
+            <a:ext cx="4727738" cy="6425154"/>
+          </a:xfrm>
+          <a:prstGeom prst="rect">
+            <a:avLst/>
+          </a:prstGeom>
+          <a:ln w="127000" cap="sq">
+            <a:solidFill>
+              <a:srgbClr val="000000"/>
+            </a:solidFill>
+            <a:miter lim="800000"/>
+          </a:ln>
+          <a:effectLst>
+            <a:outerShdw blurRad="57150" dist="50800" dir="2700000" algn="tl" rotWithShape="0">
+              <a:srgbClr val="000000">
+                <a:alpha val="40000"/>
+              </a:srgbClr>
+            </a:outerShdw>
+          </a:effectLst>
+        </p:spPr>
+      </p:pic>
+    </p:spTree>
+    <p:extLst>
+      <p:ext uri="{BB962C8B-B14F-4D97-AF65-F5344CB8AC3E}">
+        <p14:creationId xmlns:p14="http://schemas.microsoft.com/office/powerpoint/2010/main" val="1266769516"/>
+      </p:ext>
+    </p:extLst>
+  </p:cSld>
+  <p:clrMapOvr>
+    <a:masterClrMapping/>
+  </p:clrMapOvr>
+  <mc:AlternateContent xmlns:mc="http://schemas.openxmlformats.org/markup-compatibility/2006" xmlns:p159="http://schemas.microsoft.com/office/powerpoint/2015/09/main">
+    <mc:Choice Requires="p159">
+      <p:transition xmlns:p14="http://schemas.microsoft.com/office/powerpoint/2010/main" spd="slow" p14:dur="2000">
+        <p159:morph option="byObject"/>
+      </p:transition>
+    </mc:Choice>
+    <mc:Fallback xmlns="">
+      <p:transition spd="slow">
+        <p:fade/>
+      </p:transition>
+    </mc:Fallback>
+  </mc:AlternateContent>
+</p:sld>
+</file>
+
+<file path=ppt/slides/slide27.xml><?xml version="1.0" encoding="utf-8"?>
+<p:sld xmlns:a="http://schemas.openxmlformats.org/drawingml/2006/main" xmlns:r="http://schemas.openxmlformats.org/officeDocument/2006/relationships" xmlns:p="http://schemas.openxmlformats.org/presentationml/2006/main">
+  <p:cSld>
+    <p:spTree>
+      <p:nvGrpSpPr>
+        <p:cNvPr id="1" name="">
+          <a:extLst>
+            <a:ext uri="{FF2B5EF4-FFF2-40B4-BE49-F238E27FC236}">
               <a16:creationId xmlns:a16="http://schemas.microsoft.com/office/drawing/2014/main" id="{A80E8EA9-08D7-3CA5-214A-CD36B5729766}"/>
             </a:ext>
           </a:extLst>
@@ -16012,13 +16158,13 @@
   <p:clrMapOvr>
     <a:masterClrMapping/>
   </p:clrMapOvr>
-  <mc:AlternateContent xmlns:mc="http://schemas.openxmlformats.org/markup-compatibility/2006">
-    <mc:Choice xmlns:p159="http://schemas.microsoft.com/office/powerpoint/2015/09/main" Requires="p159">
+  <mc:AlternateContent xmlns:mc="http://schemas.openxmlformats.org/markup-compatibility/2006" xmlns:p159="http://schemas.microsoft.com/office/powerpoint/2015/09/main">
+    <mc:Choice Requires="p159">
       <p:transition xmlns:p14="http://schemas.microsoft.com/office/powerpoint/2010/main" spd="slow" p14:dur="2000">
         <p159:morph option="byObject"/>
       </p:transition>
     </mc:Choice>
-    <mc:Fallback>
+    <mc:Fallback xmlns="">
       <p:transition spd="slow">
         <p:fade/>
       </p:transition>
@@ -16027,7 +16173,7 @@
 </p:sld>
 </file>
 
-<file path=ppt/slides/slide27.xml><?xml version="1.0" encoding="utf-8"?>
+<file path=ppt/slides/slide28.xml><?xml version="1.0" encoding="utf-8"?>
 <p:sld xmlns:a="http://schemas.openxmlformats.org/drawingml/2006/main" xmlns:r="http://schemas.openxmlformats.org/officeDocument/2006/relationships" xmlns:p="http://schemas.openxmlformats.org/presentationml/2006/main">
   <p:cSld>
     <p:spTree>
@@ -16484,13 +16630,13 @@
   <p:clrMapOvr>
     <a:masterClrMapping/>
   </p:clrMapOvr>
-  <mc:AlternateContent xmlns:mc="http://schemas.openxmlformats.org/markup-compatibility/2006">
-    <mc:Choice xmlns:p159="http://schemas.microsoft.com/office/powerpoint/2015/09/main" Requires="p159">
+  <mc:AlternateContent xmlns:mc="http://schemas.openxmlformats.org/markup-compatibility/2006" xmlns:p159="http://schemas.microsoft.com/office/powerpoint/2015/09/main">
+    <mc:Choice Requires="p159">
       <p:transition xmlns:p14="http://schemas.microsoft.com/office/powerpoint/2010/main" spd="slow" p14:dur="2000">
         <p159:morph option="byObject"/>
       </p:transition>
     </mc:Choice>
-    <mc:Fallback>
+    <mc:Fallback xmlns="">
       <p:transition spd="slow">
         <p:fade/>
       </p:transition>
@@ -16499,7 +16645,7 @@
 </p:sld>
 </file>
 
-<file path=ppt/slides/slide28.xml><?xml version="1.0" encoding="utf-8"?>
+<file path=ppt/slides/slide29.xml><?xml version="1.0" encoding="utf-8"?>
 <p:sld xmlns:a="http://schemas.openxmlformats.org/drawingml/2006/main" xmlns:r="http://schemas.openxmlformats.org/officeDocument/2006/relationships" xmlns:p="http://schemas.openxmlformats.org/presentationml/2006/main">
   <p:cSld>
     <p:spTree>
@@ -16589,6 +16735,12 @@
           <a:lstStyle/>
           <a:p>
             <a:pPr marL="494100" indent="-457200" algn="ctr" fontAlgn="base">
+              <a:spcBef>
+                <a:spcPts val="1800"/>
+              </a:spcBef>
+              <a:spcAft>
+                <a:spcPts val="1200"/>
+              </a:spcAft>
               <a:buFont typeface="+mj-lt"/>
               <a:buAutoNum type="arabicPeriod"/>
             </a:pPr>
@@ -16604,6 +16756,12 @@
           </a:p>
           <a:p>
             <a:pPr marL="494100" indent="-457200" algn="ctr" fontAlgn="base">
+              <a:spcBef>
+                <a:spcPts val="1800"/>
+              </a:spcBef>
+              <a:spcAft>
+                <a:spcPts val="1200"/>
+              </a:spcAft>
               <a:buFont typeface="+mj-lt"/>
               <a:buAutoNum type="arabicPeriod"/>
             </a:pPr>
@@ -16652,6 +16810,12 @@
           </a:p>
           <a:p>
             <a:pPr marL="494100" indent="-457200" algn="ctr" fontAlgn="base">
+              <a:spcBef>
+                <a:spcPts val="1800"/>
+              </a:spcBef>
+              <a:spcAft>
+                <a:spcPts val="1200"/>
+              </a:spcAft>
               <a:buFont typeface="+mj-lt"/>
               <a:buAutoNum type="arabicPeriod"/>
             </a:pPr>
@@ -16676,6 +16840,12 @@
           </a:p>
           <a:p>
             <a:pPr marL="494100" indent="-457200" algn="ctr" fontAlgn="base">
+              <a:spcBef>
+                <a:spcPts val="1800"/>
+              </a:spcBef>
+              <a:spcAft>
+                <a:spcPts val="1200"/>
+              </a:spcAft>
               <a:buFont typeface="+mj-lt"/>
               <a:buAutoNum type="arabicPeriod"/>
             </a:pPr>
@@ -16736,130 +16906,6 @@
     <p:extLst>
       <p:ext uri="{BB962C8B-B14F-4D97-AF65-F5344CB8AC3E}">
         <p14:creationId xmlns:p14="http://schemas.microsoft.com/office/powerpoint/2010/main" val="2039307549"/>
-      </p:ext>
-    </p:extLst>
-  </p:cSld>
-  <p:clrMapOvr>
-    <a:masterClrMapping/>
-  </p:clrMapOvr>
-  <mc:AlternateContent xmlns:mc="http://schemas.openxmlformats.org/markup-compatibility/2006">
-    <mc:Choice xmlns:p159="http://schemas.microsoft.com/office/powerpoint/2015/09/main" Requires="p159">
-      <p:transition xmlns:p14="http://schemas.microsoft.com/office/powerpoint/2010/main" spd="slow" p14:dur="2000">
-        <p159:morph option="byObject"/>
-      </p:transition>
-    </mc:Choice>
-    <mc:Fallback>
-      <p:transition spd="slow">
-        <p:fade/>
-      </p:transition>
-    </mc:Fallback>
-  </mc:AlternateContent>
-</p:sld>
-</file>
-
-<file path=ppt/slides/slide29.xml><?xml version="1.0" encoding="utf-8"?>
-<p:sld xmlns:a="http://schemas.openxmlformats.org/drawingml/2006/main" xmlns:r="http://schemas.openxmlformats.org/officeDocument/2006/relationships" xmlns:p="http://schemas.openxmlformats.org/presentationml/2006/main">
-  <p:cSld>
-    <p:spTree>
-      <p:nvGrpSpPr>
-        <p:cNvPr id="1" name="">
-          <a:extLst>
-            <a:ext uri="{FF2B5EF4-FFF2-40B4-BE49-F238E27FC236}">
-              <a16:creationId xmlns:a16="http://schemas.microsoft.com/office/drawing/2014/main" id="{442BE268-5CC6-66E7-616C-F0CB0B608032}"/>
-            </a:ext>
-          </a:extLst>
-        </p:cNvPr>
-        <p:cNvGrpSpPr/>
-        <p:nvPr/>
-      </p:nvGrpSpPr>
-      <p:grpSpPr>
-        <a:xfrm>
-          <a:off x="0" y="0"/>
-          <a:ext cx="0" cy="0"/>
-          <a:chOff x="0" y="0"/>
-          <a:chExt cx="0" cy="0"/>
-        </a:xfrm>
-      </p:grpSpPr>
-      <p:sp>
-        <p:nvSpPr>
-          <p:cNvPr id="2" name="Cím 1">
-            <a:extLst>
-              <a:ext uri="{FF2B5EF4-FFF2-40B4-BE49-F238E27FC236}">
-                <a16:creationId xmlns:a16="http://schemas.microsoft.com/office/drawing/2014/main" id="{551BB344-7819-24CA-C8B5-B7C29B12A3DD}"/>
-              </a:ext>
-            </a:extLst>
-          </p:cNvPr>
-          <p:cNvSpPr>
-            <a:spLocks noGrp="1"/>
-          </p:cNvSpPr>
-          <p:nvPr>
-            <p:ph type="title"/>
-          </p:nvPr>
-        </p:nvSpPr>
-        <p:spPr>
-          <a:xfrm>
-            <a:off x="919119" y="2800350"/>
-            <a:ext cx="10353762" cy="1257300"/>
-          </a:xfrm>
-        </p:spPr>
-        <p:txBody>
-          <a:bodyPr>
-            <a:normAutofit/>
-          </a:bodyPr>
-          <a:lstStyle/>
-          <a:p>
-            <a:r>
-              <a:rPr lang="en-US" sz="6600" b="1" dirty="0" err="1">
-                <a:solidFill>
-                  <a:srgbClr val="FFFFFF"/>
-                </a:solidFill>
-                <a:latin typeface="Calibri" pitchFamily="34" charset="0"/>
-                <a:ea typeface="Calibri" pitchFamily="34" charset="-122"/>
-                <a:cs typeface="Calibri" pitchFamily="34" charset="-120"/>
-              </a:rPr>
-              <a:t>Köszönjük</a:t>
-            </a:r>
-            <a:r>
-              <a:rPr lang="en-US" sz="6600" b="1" dirty="0">
-                <a:solidFill>
-                  <a:srgbClr val="FFFFFF"/>
-                </a:solidFill>
-                <a:latin typeface="Calibri" pitchFamily="34" charset="0"/>
-                <a:ea typeface="Calibri" pitchFamily="34" charset="-122"/>
-                <a:cs typeface="Calibri" pitchFamily="34" charset="-120"/>
-              </a:rPr>
-              <a:t> a </a:t>
-            </a:r>
-            <a:r>
-              <a:rPr lang="en-US" sz="6600" b="1" dirty="0" err="1">
-                <a:solidFill>
-                  <a:srgbClr val="FFFFFF"/>
-                </a:solidFill>
-                <a:latin typeface="Calibri" pitchFamily="34" charset="0"/>
-                <a:ea typeface="Calibri" pitchFamily="34" charset="-122"/>
-                <a:cs typeface="Calibri" pitchFamily="34" charset="-120"/>
-              </a:rPr>
-              <a:t>figyelmet</a:t>
-            </a:r>
-            <a:r>
-              <a:rPr lang="en-US" sz="6600" b="1" dirty="0">
-                <a:solidFill>
-                  <a:srgbClr val="FFFFFF"/>
-                </a:solidFill>
-                <a:latin typeface="Calibri" pitchFamily="34" charset="0"/>
-                <a:ea typeface="Calibri" pitchFamily="34" charset="-122"/>
-                <a:cs typeface="Calibri" pitchFamily="34" charset="-120"/>
-              </a:rPr>
-              <a:t>!</a:t>
-            </a:r>
-            <a:endParaRPr lang="en-US" sz="6000" dirty="0"/>
-          </a:p>
-        </p:txBody>
-      </p:sp>
-    </p:spTree>
-    <p:extLst>
-      <p:ext uri="{BB962C8B-B14F-4D97-AF65-F5344CB8AC3E}">
-        <p14:creationId xmlns:p14="http://schemas.microsoft.com/office/powerpoint/2010/main" val="1391472701"/>
       </p:ext>
     </p:extLst>
   </p:cSld>
@@ -18022,6 +18068,130 @@
     <p:extLst>
       <p:ext uri="{BB962C8B-B14F-4D97-AF65-F5344CB8AC3E}">
         <p14:creationId xmlns:p14="http://schemas.microsoft.com/office/powerpoint/2010/main" val="2345025922"/>
+      </p:ext>
+    </p:extLst>
+  </p:cSld>
+  <p:clrMapOvr>
+    <a:masterClrMapping/>
+  </p:clrMapOvr>
+  <mc:AlternateContent xmlns:mc="http://schemas.openxmlformats.org/markup-compatibility/2006" xmlns:p159="http://schemas.microsoft.com/office/powerpoint/2015/09/main">
+    <mc:Choice Requires="p159">
+      <p:transition xmlns:p14="http://schemas.microsoft.com/office/powerpoint/2010/main" spd="slow" p14:dur="2000">
+        <p159:morph option="byObject"/>
+      </p:transition>
+    </mc:Choice>
+    <mc:Fallback xmlns="">
+      <p:transition spd="slow">
+        <p:fade/>
+      </p:transition>
+    </mc:Fallback>
+  </mc:AlternateContent>
+</p:sld>
+</file>
+
+<file path=ppt/slides/slide30.xml><?xml version="1.0" encoding="utf-8"?>
+<p:sld xmlns:a="http://schemas.openxmlformats.org/drawingml/2006/main" xmlns:r="http://schemas.openxmlformats.org/officeDocument/2006/relationships" xmlns:p="http://schemas.openxmlformats.org/presentationml/2006/main">
+  <p:cSld>
+    <p:spTree>
+      <p:nvGrpSpPr>
+        <p:cNvPr id="1" name="">
+          <a:extLst>
+            <a:ext uri="{FF2B5EF4-FFF2-40B4-BE49-F238E27FC236}">
+              <a16:creationId xmlns:a16="http://schemas.microsoft.com/office/drawing/2014/main" id="{442BE268-5CC6-66E7-616C-F0CB0B608032}"/>
+            </a:ext>
+          </a:extLst>
+        </p:cNvPr>
+        <p:cNvGrpSpPr/>
+        <p:nvPr/>
+      </p:nvGrpSpPr>
+      <p:grpSpPr>
+        <a:xfrm>
+          <a:off x="0" y="0"/>
+          <a:ext cx="0" cy="0"/>
+          <a:chOff x="0" y="0"/>
+          <a:chExt cx="0" cy="0"/>
+        </a:xfrm>
+      </p:grpSpPr>
+      <p:sp>
+        <p:nvSpPr>
+          <p:cNvPr id="2" name="Cím 1">
+            <a:extLst>
+              <a:ext uri="{FF2B5EF4-FFF2-40B4-BE49-F238E27FC236}">
+                <a16:creationId xmlns:a16="http://schemas.microsoft.com/office/drawing/2014/main" id="{551BB344-7819-24CA-C8B5-B7C29B12A3DD}"/>
+              </a:ext>
+            </a:extLst>
+          </p:cNvPr>
+          <p:cNvSpPr>
+            <a:spLocks noGrp="1"/>
+          </p:cNvSpPr>
+          <p:nvPr>
+            <p:ph type="title"/>
+          </p:nvPr>
+        </p:nvSpPr>
+        <p:spPr>
+          <a:xfrm>
+            <a:off x="919119" y="2800350"/>
+            <a:ext cx="10353762" cy="1257300"/>
+          </a:xfrm>
+        </p:spPr>
+        <p:txBody>
+          <a:bodyPr>
+            <a:normAutofit/>
+          </a:bodyPr>
+          <a:lstStyle/>
+          <a:p>
+            <a:r>
+              <a:rPr lang="en-US" sz="6600" b="1" dirty="0" err="1">
+                <a:solidFill>
+                  <a:srgbClr val="FFFFFF"/>
+                </a:solidFill>
+                <a:latin typeface="Calibri" pitchFamily="34" charset="0"/>
+                <a:ea typeface="Calibri" pitchFamily="34" charset="-122"/>
+                <a:cs typeface="Calibri" pitchFamily="34" charset="-120"/>
+              </a:rPr>
+              <a:t>Köszönjük</a:t>
+            </a:r>
+            <a:r>
+              <a:rPr lang="en-US" sz="6600" b="1" dirty="0">
+                <a:solidFill>
+                  <a:srgbClr val="FFFFFF"/>
+                </a:solidFill>
+                <a:latin typeface="Calibri" pitchFamily="34" charset="0"/>
+                <a:ea typeface="Calibri" pitchFamily="34" charset="-122"/>
+                <a:cs typeface="Calibri" pitchFamily="34" charset="-120"/>
+              </a:rPr>
+              <a:t> a </a:t>
+            </a:r>
+            <a:r>
+              <a:rPr lang="en-US" sz="6600" b="1" dirty="0" err="1">
+                <a:solidFill>
+                  <a:srgbClr val="FFFFFF"/>
+                </a:solidFill>
+                <a:latin typeface="Calibri" pitchFamily="34" charset="0"/>
+                <a:ea typeface="Calibri" pitchFamily="34" charset="-122"/>
+                <a:cs typeface="Calibri" pitchFamily="34" charset="-120"/>
+              </a:rPr>
+              <a:t>figyelmet</a:t>
+            </a:r>
+            <a:r>
+              <a:rPr lang="en-US" sz="6600" b="1" dirty="0">
+                <a:solidFill>
+                  <a:srgbClr val="FFFFFF"/>
+                </a:solidFill>
+                <a:latin typeface="Calibri" pitchFamily="34" charset="0"/>
+                <a:ea typeface="Calibri" pitchFamily="34" charset="-122"/>
+                <a:cs typeface="Calibri" pitchFamily="34" charset="-120"/>
+              </a:rPr>
+              <a:t>!</a:t>
+            </a:r>
+            <a:endParaRPr lang="en-US" sz="6000" dirty="0"/>
+          </a:p>
+        </p:txBody>
+      </p:sp>
+    </p:spTree>
+    <p:extLst>
+      <p:ext uri="{BB962C8B-B14F-4D97-AF65-F5344CB8AC3E}">
+        <p14:creationId xmlns:p14="http://schemas.microsoft.com/office/powerpoint/2010/main" val="1391472701"/>
       </p:ext>
     </p:extLst>
   </p:cSld>
@@ -22547,15 +22717,6 @@
 </file>
 
 <file path=customXml/item1.xml><?xml version="1.0" encoding="utf-8"?>
-<p:properties xmlns:p="http://schemas.microsoft.com/office/2006/metadata/properties" xmlns:xsi="http://www.w3.org/2001/XMLSchema-instance" xmlns:pc="http://schemas.microsoft.com/office/infopath/2007/PartnerControls">
-  <documentManagement>
-    <Status xmlns="71af3243-3dd4-4a8d-8c0d-dd76da1f02a5">Not started</Status>
-    <MediaServiceKeyPoints xmlns="71af3243-3dd4-4a8d-8c0d-dd76da1f02a5" xsi:nil="true"/>
-  </documentManagement>
-</p:properties>
-</file>
-
-<file path=customXml/item2.xml><?xml version="1.0" encoding="utf-8"?>
 <ct:contentTypeSchema xmlns:ct="http://schemas.microsoft.com/office/2006/metadata/contentType" xmlns:ma="http://schemas.microsoft.com/office/2006/metadata/properties/metaAttributes" ct:_="" ma:_="" ma:contentTypeName="Document" ma:contentTypeID="0x01010079F111ED35F8CC479449609E8A0923A6" ma:contentTypeVersion="12" ma:contentTypeDescription="Create a new document." ma:contentTypeScope="" ma:versionID="a410dd7f93c95333ffa1b60ed6adedd1">
   <xsd:schema xmlns:xsd="http://www.w3.org/2001/XMLSchema" xmlns:xs="http://www.w3.org/2001/XMLSchema" xmlns:p="http://schemas.microsoft.com/office/2006/metadata/properties" xmlns:ns2="71af3243-3dd4-4a8d-8c0d-dd76da1f02a5" xmlns:ns3="16c05727-aa75-4e4a-9b5f-8a80a1165891" targetNamespace="http://schemas.microsoft.com/office/2006/metadata/properties" ma:root="true" ma:fieldsID="a936d9baba76aa3866493feff160faab" ns2:_="" ns3:_="">
     <xsd:import namespace="71af3243-3dd4-4a8d-8c0d-dd76da1f02a5"/>
@@ -22776,6 +22937,15 @@
 </ct:contentTypeSchema>
 </file>
 
+<file path=customXml/item2.xml><?xml version="1.0" encoding="utf-8"?>
+<p:properties xmlns:p="http://schemas.microsoft.com/office/2006/metadata/properties" xmlns:xsi="http://www.w3.org/2001/XMLSchema-instance" xmlns:pc="http://schemas.microsoft.com/office/infopath/2007/PartnerControls">
+  <documentManagement>
+    <Status xmlns="71af3243-3dd4-4a8d-8c0d-dd76da1f02a5">Not started</Status>
+    <MediaServiceKeyPoints xmlns="71af3243-3dd4-4a8d-8c0d-dd76da1f02a5" xsi:nil="true"/>
+  </documentManagement>
+</p:properties>
+</file>
+
 <file path=customXml/item3.xml><?xml version="1.0" encoding="utf-8"?>
 <?mso-contentType ?>
 <FormTemplates xmlns="http://schemas.microsoft.com/sharepoint/v3/contenttype/forms">
@@ -22786,16 +22956,6 @@
 </file>
 
 <file path=customXml/itemProps1.xml><?xml version="1.0" encoding="utf-8"?>
-<ds:datastoreItem xmlns:ds="http://schemas.openxmlformats.org/officeDocument/2006/customXml" ds:itemID="{2C4C00F4-06E9-43E3-AD97-88A857CEFA82}">
-  <ds:schemaRefs>
-    <ds:schemaRef ds:uri="http://schemas.microsoft.com/office/2006/metadata/properties"/>
-    <ds:schemaRef ds:uri="http://schemas.microsoft.com/office/infopath/2007/PartnerControls"/>
-    <ds:schemaRef ds:uri="71af3243-3dd4-4a8d-8c0d-dd76da1f02a5"/>
-  </ds:schemaRefs>
-</ds:datastoreItem>
-</file>
-
-<file path=customXml/itemProps2.xml><?xml version="1.0" encoding="utf-8"?>
 <ds:datastoreItem xmlns:ds="http://schemas.openxmlformats.org/officeDocument/2006/customXml" ds:itemID="{0585E981-8C91-4205-A0C3-C991F42B4C9E}">
   <ds:schemaRefs>
     <ds:schemaRef ds:uri="http://schemas.microsoft.com/office/2006/metadata/contentType"/>
@@ -22814,6 +22974,16 @@
 </ds:datastoreItem>
 </file>
 
+<file path=customXml/itemProps2.xml><?xml version="1.0" encoding="utf-8"?>
+<ds:datastoreItem xmlns:ds="http://schemas.openxmlformats.org/officeDocument/2006/customXml" ds:itemID="{2C4C00F4-06E9-43E3-AD97-88A857CEFA82}">
+  <ds:schemaRefs>
+    <ds:schemaRef ds:uri="http://schemas.microsoft.com/office/2006/metadata/properties"/>
+    <ds:schemaRef ds:uri="http://schemas.microsoft.com/office/infopath/2007/PartnerControls"/>
+    <ds:schemaRef ds:uri="71af3243-3dd4-4a8d-8c0d-dd76da1f02a5"/>
+  </ds:schemaRefs>
+</ds:datastoreItem>
+</file>
+
 <file path=customXml/itemProps3.xml><?xml version="1.0" encoding="utf-8"?>
 <ds:datastoreItem xmlns:ds="http://schemas.openxmlformats.org/officeDocument/2006/customXml" ds:itemID="{64B270AB-C138-415C-897E-3C24487DECF1}">
   <ds:schemaRefs>
